--- a/Day03-OOP-and-OpenAI-Codex-Walkthrough/Day03_Deck_OOP_and_OpenAI_Codex_Walkthrough.pptx
+++ b/Day03-OOP-and-OpenAI-Codex-Walkthrough/Day03_Deck_OOP_and_OpenAI_Codex_Walkthrough.pptx
@@ -4938,13 +4938,13 @@
           <a:noFill/>
         </p:spPr>
         <p:txBody>
-          <a:bodyPr wrap="square" lIns="0" rIns="0" tIns="0" bIns="0" anchor="t">
-            <a:spAutoFit/>
-          </a:bodyPr>
-          <a:lstStyle/>
-          <a:p>
-            <a:r>
-              <a:rPr sz="1019" b="0" i="0">
+          <a:bodyPr wrap="none" lIns="0" rIns="0" tIns="0" bIns="0" anchor="t">
+            <a:spAutoFit/>
+          </a:bodyPr>
+          <a:lstStyle/>
+          <a:p>
+            <a:r>
+              <a:rPr sz="897" b="0" i="0">
                 <a:solidFill>
                   <a:srgbClr val="EAF7F5"/>
                 </a:solidFill>
@@ -4955,7 +4955,7 @@
           </a:p>
           <a:p>
             <a:r>
-              <a:rPr sz="1019" b="0" i="0">
+              <a:rPr sz="897" b="0" i="0">
                 <a:solidFill>
                   <a:srgbClr val="EAF7F5"/>
                 </a:solidFill>
@@ -4966,7 +4966,7 @@
           </a:p>
           <a:p>
             <a:r>
-              <a:rPr sz="1019" b="0" i="0">
+              <a:rPr sz="897" b="0" i="0">
                 <a:solidFill>
                   <a:srgbClr val="EAF7F5"/>
                 </a:solidFill>
@@ -4977,7 +4977,7 @@
           </a:p>
           <a:p>
             <a:r>
-              <a:rPr sz="1019" b="0" i="0">
+              <a:rPr sz="897" b="0" i="0">
                 <a:solidFill>
                   <a:srgbClr val="EAF7F5"/>
                 </a:solidFill>
@@ -4988,7 +4988,7 @@
           </a:p>
           <a:p>
             <a:r>
-              <a:rPr sz="1019" b="0" i="0">
+              <a:rPr sz="897" b="0" i="0">
                 <a:solidFill>
                   <a:srgbClr val="EAF7F5"/>
                 </a:solidFill>
@@ -4999,7 +4999,7 @@
           </a:p>
           <a:p>
             <a:r>
-              <a:rPr sz="1019" b="0" i="0">
+              <a:rPr sz="897" b="0" i="0">
                 <a:solidFill>
                   <a:srgbClr val="EAF7F5"/>
                 </a:solidFill>
@@ -5010,7 +5010,7 @@
           </a:p>
           <a:p>
             <a:r>
-              <a:rPr sz="1019" b="0" i="0">
+              <a:rPr sz="897" b="0" i="0">
                 <a:solidFill>
                   <a:srgbClr val="EAF7F5"/>
                 </a:solidFill>
@@ -5021,7 +5021,7 @@
           </a:p>
           <a:p>
             <a:r>
-              <a:rPr sz="1019" b="0" i="0">
+              <a:rPr sz="897" b="0" i="0">
                 <a:solidFill>
                   <a:srgbClr val="EAF7F5"/>
                 </a:solidFill>
@@ -5032,7 +5032,7 @@
           </a:p>
           <a:p>
             <a:r>
-              <a:rPr sz="1019" b="0" i="0">
+              <a:rPr sz="897" b="0" i="0">
                 <a:solidFill>
                   <a:srgbClr val="EAF7F5"/>
                 </a:solidFill>
@@ -5043,7 +5043,7 @@
           </a:p>
           <a:p>
             <a:r>
-              <a:rPr sz="1019" b="0" i="0">
+              <a:rPr sz="897" b="0" i="0">
                 <a:solidFill>
                   <a:srgbClr val="EAF7F5"/>
                 </a:solidFill>
@@ -5054,7 +5054,7 @@
           </a:p>
           <a:p>
             <a:r>
-              <a:rPr sz="1019" b="0" i="0">
+              <a:rPr sz="897" b="0" i="0">
                 <a:solidFill>
                   <a:srgbClr val="EAF7F5"/>
                 </a:solidFill>
@@ -5065,7 +5065,7 @@
           </a:p>
           <a:p>
             <a:r>
-              <a:rPr sz="1019" b="0" i="0">
+              <a:rPr sz="897" b="0" i="0">
                 <a:solidFill>
                   <a:srgbClr val="EAF7F5"/>
                 </a:solidFill>
@@ -5076,7 +5076,7 @@
           </a:p>
           <a:p>
             <a:r>
-              <a:rPr sz="1019" b="0" i="0">
+              <a:rPr sz="897" b="0" i="0">
                 <a:solidFill>
                   <a:srgbClr val="EAF7F5"/>
                 </a:solidFill>
@@ -5364,13 +5364,13 @@
           <a:noFill/>
         </p:spPr>
         <p:txBody>
-          <a:bodyPr wrap="square" lIns="0" rIns="0" tIns="0" bIns="0" anchor="t">
-            <a:spAutoFit/>
-          </a:bodyPr>
-          <a:lstStyle/>
-          <a:p>
-            <a:r>
-              <a:rPr sz="1040" b="0" i="0">
+          <a:bodyPr wrap="none" lIns="0" rIns="0" tIns="0" bIns="0" anchor="t">
+            <a:spAutoFit/>
+          </a:bodyPr>
+          <a:lstStyle/>
+          <a:p>
+            <a:r>
+              <a:rPr sz="915" b="0" i="0">
                 <a:solidFill>
                   <a:srgbClr val="EAF7F5"/>
                 </a:solidFill>
@@ -5381,7 +5381,7 @@
           </a:p>
           <a:p>
             <a:r>
-              <a:rPr sz="1040" b="0" i="0">
+              <a:rPr sz="915" b="0" i="0">
                 <a:solidFill>
                   <a:srgbClr val="EAF7F5"/>
                 </a:solidFill>
@@ -5392,7 +5392,7 @@
           </a:p>
           <a:p>
             <a:r>
-              <a:rPr sz="1040" b="0" i="0">
+              <a:rPr sz="915" b="0" i="0">
                 <a:solidFill>
                   <a:srgbClr val="EAF7F5"/>
                 </a:solidFill>
@@ -5403,7 +5403,7 @@
           </a:p>
           <a:p>
             <a:r>
-              <a:rPr sz="1040" b="0" i="0">
+              <a:rPr sz="915" b="0" i="0">
                 <a:solidFill>
                   <a:srgbClr val="EAF7F5"/>
                 </a:solidFill>
@@ -5414,7 +5414,7 @@
           </a:p>
           <a:p>
             <a:r>
-              <a:rPr sz="1040" b="0" i="0">
+              <a:rPr sz="915" b="0" i="0">
                 <a:solidFill>
                   <a:srgbClr val="EAF7F5"/>
                 </a:solidFill>
@@ -5425,7 +5425,7 @@
           </a:p>
           <a:p>
             <a:r>
-              <a:rPr sz="1040" b="0" i="0">
+              <a:rPr sz="915" b="0" i="0">
                 <a:solidFill>
                   <a:srgbClr val="EAF7F5"/>
                 </a:solidFill>
@@ -5436,7 +5436,7 @@
           </a:p>
           <a:p>
             <a:r>
-              <a:rPr sz="1040" b="0" i="0">
+              <a:rPr sz="915" b="0" i="0">
                 <a:solidFill>
                   <a:srgbClr val="EAF7F5"/>
                 </a:solidFill>
@@ -5447,7 +5447,7 @@
           </a:p>
           <a:p>
             <a:r>
-              <a:rPr sz="1040" b="0" i="0">
+              <a:rPr sz="915" b="0" i="0">
                 <a:solidFill>
                   <a:srgbClr val="EAF7F5"/>
                 </a:solidFill>
@@ -6699,7 +6699,7 @@
           <a:noFill/>
         </p:spPr>
         <p:txBody>
-          <a:bodyPr wrap="square" lIns="0" rIns="0" tIns="0" bIns="0" anchor="t">
+          <a:bodyPr wrap="none" lIns="0" rIns="0" tIns="0" bIns="0" anchor="t">
             <a:spAutoFit/>
           </a:bodyPr>
           <a:lstStyle/>
@@ -13546,13 +13546,13 @@
           <a:noFill/>
         </p:spPr>
         <p:txBody>
-          <a:bodyPr wrap="square" lIns="0" rIns="0" tIns="0" bIns="0" anchor="t">
-            <a:spAutoFit/>
-          </a:bodyPr>
-          <a:lstStyle/>
-          <a:p>
-            <a:r>
-              <a:rPr sz="1186" b="0" i="0">
+          <a:bodyPr wrap="none" lIns="0" rIns="0" tIns="0" bIns="0" anchor="t">
+            <a:spAutoFit/>
+          </a:bodyPr>
+          <a:lstStyle/>
+          <a:p>
+            <a:r>
+              <a:rPr sz="1043" b="0" i="0">
                 <a:solidFill>
                   <a:srgbClr val="EAF7F5"/>
                 </a:solidFill>
@@ -13563,7 +13563,7 @@
           </a:p>
           <a:p>
             <a:r>
-              <a:rPr sz="1186" b="0" i="0">
+              <a:rPr sz="1043" b="0" i="0">
                 <a:solidFill>
                   <a:srgbClr val="EAF7F5"/>
                 </a:solidFill>
@@ -13574,7 +13574,7 @@
           </a:p>
           <a:p>
             <a:r>
-              <a:rPr sz="1186" b="0" i="0">
+              <a:rPr sz="1043" b="0" i="0">
                 <a:solidFill>
                   <a:srgbClr val="EAF7F5"/>
                 </a:solidFill>
@@ -13585,7 +13585,7 @@
           </a:p>
           <a:p>
             <a:r>
-              <a:rPr sz="1186" b="0" i="0">
+              <a:rPr sz="1043" b="0" i="0">
                 <a:solidFill>
                   <a:srgbClr val="EAF7F5"/>
                 </a:solidFill>
@@ -13596,7 +13596,7 @@
           </a:p>
           <a:p>
             <a:r>
-              <a:rPr sz="1186" b="0" i="0">
+              <a:rPr sz="1043" b="0" i="0">
                 <a:solidFill>
                   <a:srgbClr val="EAF7F5"/>
                 </a:solidFill>
@@ -13607,7 +13607,7 @@
           </a:p>
           <a:p>
             <a:r>
-              <a:rPr sz="1186" b="0" i="0">
+              <a:rPr sz="1043" b="0" i="0">
                 <a:solidFill>
                   <a:srgbClr val="EAF7F5"/>
                 </a:solidFill>
@@ -13618,7 +13618,7 @@
           </a:p>
           <a:p>
             <a:r>
-              <a:rPr sz="1186" b="0" i="0">
+              <a:rPr sz="1043" b="0" i="0">
                 <a:solidFill>
                   <a:srgbClr val="EAF7F5"/>
                 </a:solidFill>
@@ -13629,7 +13629,7 @@
           </a:p>
           <a:p>
             <a:r>
-              <a:rPr sz="1186" b="0" i="0">
+              <a:rPr sz="1043" b="0" i="0">
                 <a:solidFill>
                   <a:srgbClr val="EAF7F5"/>
                 </a:solidFill>
@@ -13640,7 +13640,7 @@
           </a:p>
           <a:p>
             <a:r>
-              <a:rPr sz="1186" b="0" i="0">
+              <a:rPr sz="1043" b="0" i="0">
                 <a:solidFill>
                   <a:srgbClr val="EAF7F5"/>
                 </a:solidFill>
@@ -13651,7 +13651,7 @@
           </a:p>
           <a:p>
             <a:r>
-              <a:rPr sz="1186" b="0" i="0">
+              <a:rPr sz="1043" b="0" i="0">
                 <a:solidFill>
                   <a:srgbClr val="EAF7F5"/>
                 </a:solidFill>
@@ -13662,7 +13662,7 @@
           </a:p>
           <a:p>
             <a:r>
-              <a:rPr sz="1186" b="0" i="0">
+              <a:rPr sz="1043" b="0" i="0">
                 <a:solidFill>
                   <a:srgbClr val="EAF7F5"/>
                 </a:solidFill>
@@ -13673,7 +13673,7 @@
           </a:p>
           <a:p>
             <a:r>
-              <a:rPr sz="1186" b="0" i="0">
+              <a:rPr sz="1043" b="0" i="0">
                 <a:solidFill>
                   <a:srgbClr val="EAF7F5"/>
                 </a:solidFill>
@@ -13684,7 +13684,7 @@
           </a:p>
           <a:p>
             <a:r>
-              <a:rPr sz="1186" b="0" i="0">
+              <a:rPr sz="1043" b="0" i="0">
                 <a:solidFill>
                   <a:srgbClr val="EAF7F5"/>
                 </a:solidFill>
@@ -13695,7 +13695,7 @@
           </a:p>
           <a:p>
             <a:r>
-              <a:rPr sz="1186" b="0" i="0">
+              <a:rPr sz="1043" b="0" i="0">
                 <a:solidFill>
                   <a:srgbClr val="EAF7F5"/>
                 </a:solidFill>
@@ -14078,13 +14078,13 @@
           <a:noFill/>
         </p:spPr>
         <p:txBody>
-          <a:bodyPr wrap="square" lIns="0" rIns="0" tIns="0" bIns="0" anchor="t">
-            <a:spAutoFit/>
-          </a:bodyPr>
-          <a:lstStyle/>
-          <a:p>
-            <a:r>
-              <a:rPr sz="1400" b="0" i="0">
+          <a:bodyPr wrap="none" lIns="0" rIns="0" tIns="0" bIns="0" anchor="t">
+            <a:spAutoFit/>
+          </a:bodyPr>
+          <a:lstStyle/>
+          <a:p>
+            <a:r>
+              <a:rPr sz="1246" b="0" i="0">
                 <a:solidFill>
                   <a:srgbClr val="EAF7F5"/>
                 </a:solidFill>
@@ -14095,7 +14095,7 @@
           </a:p>
           <a:p>
             <a:r>
-              <a:rPr sz="1400" b="0" i="0">
+              <a:rPr sz="1246" b="0" i="0">
                 <a:solidFill>
                   <a:srgbClr val="EAF7F5"/>
                 </a:solidFill>
@@ -14106,7 +14106,7 @@
           </a:p>
           <a:p>
             <a:r>
-              <a:rPr sz="1400" b="0" i="0">
+              <a:rPr sz="1246" b="0" i="0">
                 <a:solidFill>
                   <a:srgbClr val="EAF7F5"/>
                 </a:solidFill>
@@ -14117,7 +14117,7 @@
           </a:p>
           <a:p>
             <a:r>
-              <a:rPr sz="1400" b="0" i="0">
+              <a:rPr sz="1246" b="0" i="0">
                 <a:solidFill>
                   <a:srgbClr val="EAF7F5"/>
                 </a:solidFill>
@@ -14128,7 +14128,7 @@
           </a:p>
           <a:p>
             <a:r>
-              <a:rPr sz="1400" b="0" i="0">
+              <a:rPr sz="1246" b="0" i="0">
                 <a:solidFill>
                   <a:srgbClr val="EAF7F5"/>
                 </a:solidFill>
@@ -14139,7 +14139,7 @@
           </a:p>
           <a:p>
             <a:r>
-              <a:rPr sz="1400" b="0" i="0">
+              <a:rPr sz="1246" b="0" i="0">
                 <a:solidFill>
                   <a:srgbClr val="EAF7F5"/>
                 </a:solidFill>
@@ -14150,7 +14150,7 @@
           </a:p>
           <a:p>
             <a:r>
-              <a:rPr sz="1400" b="0" i="0">
+              <a:rPr sz="1246" b="0" i="0">
                 <a:solidFill>
                   <a:srgbClr val="EAF7F5"/>
                 </a:solidFill>
@@ -14161,7 +14161,7 @@
           </a:p>
           <a:p>
             <a:r>
-              <a:rPr sz="1400" b="0" i="0">
+              <a:rPr sz="1246" b="0" i="0">
                 <a:solidFill>
                   <a:srgbClr val="EAF7F5"/>
                 </a:solidFill>
@@ -14172,7 +14172,7 @@
           </a:p>
           <a:p>
             <a:r>
-              <a:rPr sz="1400" b="0" i="0">
+              <a:rPr sz="1246" b="0" i="0">
                 <a:solidFill>
                   <a:srgbClr val="EAF7F5"/>
                 </a:solidFill>
@@ -14183,7 +14183,7 @@
           </a:p>
           <a:p>
             <a:r>
-              <a:rPr sz="1400" b="0" i="0">
+              <a:rPr sz="1246" b="0" i="0">
                 <a:solidFill>
                   <a:srgbClr val="EAF7F5"/>
                 </a:solidFill>
@@ -23256,13 +23256,13 @@
           <a:noFill/>
         </p:spPr>
         <p:txBody>
-          <a:bodyPr wrap="square" lIns="0" rIns="0" tIns="0" bIns="0" anchor="t">
-            <a:spAutoFit/>
-          </a:bodyPr>
-          <a:lstStyle/>
-          <a:p>
-            <a:r>
-              <a:rPr sz="1243" b="0" i="0">
+          <a:bodyPr wrap="none" lIns="0" rIns="0" tIns="0" bIns="0" anchor="t">
+            <a:spAutoFit/>
+          </a:bodyPr>
+          <a:lstStyle/>
+          <a:p>
+            <a:r>
+              <a:rPr sz="1094" b="0" i="0">
                 <a:solidFill>
                   <a:srgbClr val="EAF7F5"/>
                 </a:solidFill>
@@ -23273,7 +23273,7 @@
           </a:p>
           <a:p>
             <a:r>
-              <a:rPr sz="1243" b="0" i="0">
+              <a:rPr sz="1094" b="0" i="0">
                 <a:solidFill>
                   <a:srgbClr val="EAF7F5"/>
                 </a:solidFill>
@@ -23284,7 +23284,7 @@
           </a:p>
           <a:p>
             <a:r>
-              <a:rPr sz="1243" b="0" i="0">
+              <a:rPr sz="1094" b="0" i="0">
                 <a:solidFill>
                   <a:srgbClr val="EAF7F5"/>
                 </a:solidFill>
@@ -23295,7 +23295,7 @@
           </a:p>
           <a:p>
             <a:r>
-              <a:rPr sz="1243" b="0" i="0">
+              <a:rPr sz="1094" b="0" i="0">
                 <a:solidFill>
                   <a:srgbClr val="EAF7F5"/>
                 </a:solidFill>
@@ -23306,7 +23306,7 @@
           </a:p>
           <a:p>
             <a:r>
-              <a:rPr sz="1243" b="0" i="0">
+              <a:rPr sz="1094" b="0" i="0">
                 <a:solidFill>
                   <a:srgbClr val="EAF7F5"/>
                 </a:solidFill>
@@ -23317,7 +23317,7 @@
           </a:p>
           <a:p>
             <a:r>
-              <a:rPr sz="1243" b="0" i="0">
+              <a:rPr sz="1094" b="0" i="0">
                 <a:solidFill>
                   <a:srgbClr val="EAF7F5"/>
                 </a:solidFill>
@@ -23328,7 +23328,7 @@
           </a:p>
           <a:p>
             <a:r>
-              <a:rPr sz="1243" b="0" i="0">
+              <a:rPr sz="1094" b="0" i="0">
                 <a:solidFill>
                   <a:srgbClr val="EAF7F5"/>
                 </a:solidFill>
@@ -23339,7 +23339,7 @@
           </a:p>
           <a:p>
             <a:r>
-              <a:rPr sz="1243" b="0" i="0">
+              <a:rPr sz="1094" b="0" i="0">
                 <a:solidFill>
                   <a:srgbClr val="EAF7F5"/>
                 </a:solidFill>
@@ -23350,7 +23350,7 @@
           </a:p>
           <a:p>
             <a:r>
-              <a:rPr sz="1243" b="0" i="0">
+              <a:rPr sz="1094" b="0" i="0">
                 <a:solidFill>
                   <a:srgbClr val="EAF7F5"/>
                 </a:solidFill>
@@ -23361,7 +23361,7 @@
           </a:p>
           <a:p>
             <a:r>
-              <a:rPr sz="1243" b="0" i="0">
+              <a:rPr sz="1094" b="0" i="0">
                 <a:solidFill>
                   <a:srgbClr val="EAF7F5"/>
                 </a:solidFill>
@@ -23372,7 +23372,7 @@
           </a:p>
           <a:p>
             <a:r>
-              <a:rPr sz="1243" b="0" i="0">
+              <a:rPr sz="1094" b="0" i="0">
                 <a:solidFill>
                   <a:srgbClr val="EAF7F5"/>
                 </a:solidFill>
@@ -24553,13 +24553,13 @@
           <a:noFill/>
         </p:spPr>
         <p:txBody>
-          <a:bodyPr wrap="square" lIns="0" rIns="0" tIns="0" bIns="0" anchor="t">
-            <a:spAutoFit/>
-          </a:bodyPr>
-          <a:lstStyle/>
-          <a:p>
-            <a:r>
-              <a:rPr sz="1400" b="0" i="0">
+          <a:bodyPr wrap="none" lIns="0" rIns="0" tIns="0" bIns="0" anchor="t">
+            <a:spAutoFit/>
+          </a:bodyPr>
+          <a:lstStyle/>
+          <a:p>
+            <a:r>
+              <a:rPr sz="1246" b="0" i="0">
                 <a:solidFill>
                   <a:srgbClr val="EAF7F5"/>
                 </a:solidFill>
@@ -24570,7 +24570,7 @@
           </a:p>
           <a:p>
             <a:r>
-              <a:rPr sz="1400" b="0" i="0">
+              <a:rPr sz="1246" b="0" i="0">
                 <a:solidFill>
                   <a:srgbClr val="EAF7F5"/>
                 </a:solidFill>
@@ -24581,7 +24581,7 @@
           </a:p>
           <a:p>
             <a:r>
-              <a:rPr sz="1400" b="0" i="0">
+              <a:rPr sz="1246" b="0" i="0">
                 <a:solidFill>
                   <a:srgbClr val="EAF7F5"/>
                 </a:solidFill>
@@ -24592,7 +24592,7 @@
           </a:p>
           <a:p>
             <a:r>
-              <a:rPr sz="1400" b="0" i="0">
+              <a:rPr sz="1246" b="0" i="0">
                 <a:solidFill>
                   <a:srgbClr val="EAF7F5"/>
                 </a:solidFill>
@@ -24603,7 +24603,7 @@
           </a:p>
           <a:p>
             <a:r>
-              <a:rPr sz="1400" b="0" i="0">
+              <a:rPr sz="1246" b="0" i="0">
                 <a:solidFill>
                   <a:srgbClr val="EAF7F5"/>
                 </a:solidFill>
@@ -24614,7 +24614,7 @@
           </a:p>
           <a:p>
             <a:r>
-              <a:rPr sz="1400" b="0" i="0">
+              <a:rPr sz="1246" b="0" i="0">
                 <a:solidFill>
                   <a:srgbClr val="EAF7F5"/>
                 </a:solidFill>
@@ -24625,7 +24625,7 @@
           </a:p>
           <a:p>
             <a:r>
-              <a:rPr sz="1400" b="0" i="0">
+              <a:rPr sz="1246" b="0" i="0">
                 <a:solidFill>
                   <a:srgbClr val="EAF7F5"/>
                 </a:solidFill>
@@ -24636,7 +24636,7 @@
           </a:p>
           <a:p>
             <a:r>
-              <a:rPr sz="1400" b="0" i="0">
+              <a:rPr sz="1246" b="0" i="0">
                 <a:solidFill>
                   <a:srgbClr val="EAF7F5"/>
                 </a:solidFill>
@@ -24647,7 +24647,7 @@
           </a:p>
           <a:p>
             <a:r>
-              <a:rPr sz="1400" b="0" i="0">
+              <a:rPr sz="1246" b="0" i="0">
                 <a:solidFill>
                   <a:srgbClr val="EAF7F5"/>
                 </a:solidFill>
@@ -24658,7 +24658,7 @@
           </a:p>
           <a:p>
             <a:r>
-              <a:rPr sz="1400" b="0" i="0">
+              <a:rPr sz="1246" b="0" i="0">
                 <a:solidFill>
                   <a:srgbClr val="EAF7F5"/>
                 </a:solidFill>
@@ -24669,7 +24669,7 @@
           </a:p>
           <a:p>
             <a:r>
-              <a:rPr sz="1400" b="0" i="0">
+              <a:rPr sz="1246" b="0" i="0">
                 <a:solidFill>
                   <a:srgbClr val="EAF7F5"/>
                 </a:solidFill>
@@ -24680,7 +24680,7 @@
           </a:p>
           <a:p>
             <a:r>
-              <a:rPr sz="1400" b="0" i="0">
+              <a:rPr sz="1246" b="0" i="0">
                 <a:solidFill>
                   <a:srgbClr val="EAF7F5"/>
                 </a:solidFill>
@@ -24691,7 +24691,7 @@
           </a:p>
           <a:p>
             <a:r>
-              <a:rPr sz="1400" b="0" i="0">
+              <a:rPr sz="1246" b="0" i="0">
                 <a:solidFill>
                   <a:srgbClr val="EAF7F5"/>
                 </a:solidFill>
@@ -24702,7 +24702,7 @@
           </a:p>
           <a:p>
             <a:r>
-              <a:rPr sz="1400" b="0" i="0">
+              <a:rPr sz="1246" b="0" i="0">
                 <a:solidFill>
                   <a:srgbClr val="EAF7F5"/>
                 </a:solidFill>
@@ -24990,13 +24990,13 @@
           <a:noFill/>
         </p:spPr>
         <p:txBody>
-          <a:bodyPr wrap="square" lIns="0" rIns="0" tIns="0" bIns="0" anchor="t">
-            <a:spAutoFit/>
-          </a:bodyPr>
-          <a:lstStyle/>
-          <a:p>
-            <a:r>
-              <a:rPr sz="1159" b="0" i="0">
+          <a:bodyPr wrap="none" lIns="0" rIns="0" tIns="0" bIns="0" anchor="t">
+            <a:spAutoFit/>
+          </a:bodyPr>
+          <a:lstStyle/>
+          <a:p>
+            <a:r>
+              <a:rPr sz="1020" b="0" i="0">
                 <a:solidFill>
                   <a:srgbClr val="EAF7F5"/>
                 </a:solidFill>
@@ -25007,7 +25007,7 @@
           </a:p>
           <a:p>
             <a:r>
-              <a:rPr sz="1159" b="0" i="0">
+              <a:rPr sz="1020" b="0" i="0">
                 <a:solidFill>
                   <a:srgbClr val="EAF7F5"/>
                 </a:solidFill>
@@ -25018,7 +25018,7 @@
           </a:p>
           <a:p>
             <a:r>
-              <a:rPr sz="1159" b="0" i="0">
+              <a:rPr sz="1020" b="0" i="0">
                 <a:solidFill>
                   <a:srgbClr val="EAF7F5"/>
                 </a:solidFill>
@@ -25029,7 +25029,7 @@
           </a:p>
           <a:p>
             <a:r>
-              <a:rPr sz="1159" b="0" i="0">
+              <a:rPr sz="1020" b="0" i="0">
                 <a:solidFill>
                   <a:srgbClr val="EAF7F5"/>
                 </a:solidFill>
@@ -25040,7 +25040,7 @@
           </a:p>
           <a:p>
             <a:r>
-              <a:rPr sz="1159" b="0" i="0">
+              <a:rPr sz="1020" b="0" i="0">
                 <a:solidFill>
                   <a:srgbClr val="EAF7F5"/>
                 </a:solidFill>
@@ -25051,7 +25051,7 @@
           </a:p>
           <a:p>
             <a:r>
-              <a:rPr sz="1159" b="0" i="0">
+              <a:rPr sz="1020" b="0" i="0">
                 <a:solidFill>
                   <a:srgbClr val="EAF7F5"/>
                 </a:solidFill>
@@ -25062,7 +25062,7 @@
           </a:p>
           <a:p>
             <a:r>
-              <a:rPr sz="1159" b="0" i="0">
+              <a:rPr sz="1020" b="0" i="0">
                 <a:solidFill>
                   <a:srgbClr val="EAF7F5"/>
                 </a:solidFill>
@@ -25073,7 +25073,7 @@
           </a:p>
           <a:p>
             <a:r>
-              <a:rPr sz="1159" b="0" i="0">
+              <a:rPr sz="1020" b="0" i="0">
                 <a:solidFill>
                   <a:srgbClr val="EAF7F5"/>
                 </a:solidFill>
@@ -25084,7 +25084,7 @@
           </a:p>
           <a:p>
             <a:r>
-              <a:rPr sz="1159" b="0" i="0">
+              <a:rPr sz="1020" b="0" i="0">
                 <a:solidFill>
                   <a:srgbClr val="EAF7F5"/>
                 </a:solidFill>
@@ -25095,7 +25095,7 @@
           </a:p>
           <a:p>
             <a:r>
-              <a:rPr sz="1159" b="0" i="0">
+              <a:rPr sz="1020" b="0" i="0">
                 <a:solidFill>
                   <a:srgbClr val="EAF7F5"/>
                 </a:solidFill>
@@ -25106,7 +25106,7 @@
           </a:p>
           <a:p>
             <a:r>
-              <a:rPr sz="1159" b="0" i="0">
+              <a:rPr sz="1020" b="0" i="0">
                 <a:solidFill>
                   <a:srgbClr val="EAF7F5"/>
                 </a:solidFill>
@@ -25117,7 +25117,7 @@
           </a:p>
           <a:p>
             <a:r>
-              <a:rPr sz="1159" b="0" i="0">
+              <a:rPr sz="1020" b="0" i="0">
                 <a:solidFill>
                   <a:srgbClr val="EAF7F5"/>
                 </a:solidFill>
@@ -25128,7 +25128,7 @@
           </a:p>
           <a:p>
             <a:r>
-              <a:rPr sz="1159" b="0" i="0">
+              <a:rPr sz="1020" b="0" i="0">
                 <a:solidFill>
                   <a:srgbClr val="EAF7F5"/>
                 </a:solidFill>
@@ -25139,7 +25139,7 @@
           </a:p>
           <a:p>
             <a:r>
-              <a:rPr sz="1159" b="0" i="0">
+              <a:rPr sz="1020" b="0" i="0">
                 <a:solidFill>
                   <a:srgbClr val="EAF7F5"/>
                 </a:solidFill>
